--- a/PPT-version/Predictive-AI-MLOps/Predictive-AI-MLOps-讲义.pptx
+++ b/PPT-version/Predictive-AI-MLOps/Predictive-AI-MLOps-讲义.pptx
@@ -4398,7 +4398,7 @@
         </p:nvGraphicFramePr>
         <p:xfrm>
           <a:off x="566928" y="1874519"/>
-          <a:ext cx="11057837" cy="2560320"/>
+          <a:ext cx="11057838" cy="2560320"/>
         </p:xfrm>
         <a:graphic>
           <a:graphicData uri="http://schemas.openxmlformats.org/drawingml/2006/table">
@@ -4407,10 +4407,10 @@
                 <a:tableStyleId>{5C22544A-7EE6-4342-B048-85BDC9FD1C3A}</a:tableStyleId>
               </a:tblPr>
               <a:tblGrid>
-                <a:gridCol w="1990411"/>
-                <a:gridCol w="3096194"/>
-                <a:gridCol w="3096194"/>
-                <a:gridCol w="2875038"/>
+                <a:gridCol w="1990390"/>
+                <a:gridCol w="3096184"/>
+                <a:gridCol w="3096184"/>
+                <a:gridCol w="2875080"/>
               </a:tblGrid>
               <a:tr h="365760">
                 <a:tc>
@@ -6196,9 +6196,9 @@
                 <a:tableStyleId>{5C22544A-7EE6-4342-B048-85BDC9FD1C3A}</a:tableStyleId>
               </a:tblPr>
               <a:tblGrid>
-                <a:gridCol w="2703027"/>
-                <a:gridCol w="4177405"/>
-                <a:gridCol w="4177405"/>
+                <a:gridCol w="2703035"/>
+                <a:gridCol w="4177401"/>
+                <a:gridCol w="4177401"/>
               </a:tblGrid>
               <a:tr h="365760">
                 <a:tc>
@@ -7235,11 +7235,11 @@
                 <a:tableStyleId>{5C22544A-7EE6-4342-B048-85BDC9FD1C3A}</a:tableStyleId>
               </a:tblPr>
               <a:tblGrid>
-                <a:gridCol w="1701206"/>
-                <a:gridCol w="2721929"/>
+                <a:gridCol w="1701241"/>
+                <a:gridCol w="2721894"/>
                 <a:gridCol w="2211567"/>
-                <a:gridCol w="2126507"/>
-                <a:gridCol w="2296628"/>
+                <a:gridCol w="2126528"/>
+                <a:gridCol w="2296607"/>
               </a:tblGrid>
               <a:tr h="365760">
                 <a:tc>
@@ -7500,7 +7500,7 @@
                           </a:solidFill>
                           <a:latin typeface="Calibri"/>
                         </a:rPr>
-                        <a:t>Bedrock、Vertex AI Studio、Microsoft Foundry</a:t>
+                        <a:t>Bedrock、Agent Studio（原 Vertex AI Studio，隶属 Gemini Enterprise Agent Platform）、Microsoft Foundry</a:t>
                       </a:r>
                     </a:p>
                   </a:txBody>
@@ -7612,7 +7612,7 @@
                           </a:solidFill>
                           <a:latin typeface="Calibri"/>
                         </a:rPr>
-                        <a:t>SageMaker 端点、Vertex 端点、Azure ML 在线端点</a:t>
+                        <a:t>SageMaker 端点、Gemini Enterprise Agent Platform 端点（原 Vertex 端点）、Azure ML 在线端点</a:t>
                       </a:r>
                     </a:p>
                   </a:txBody>
@@ -9741,7 +9741,7 @@
         </p:nvGraphicFramePr>
         <p:xfrm>
           <a:off x="566928" y="1874519"/>
-          <a:ext cx="11057837" cy="2560320"/>
+          <a:ext cx="11057838" cy="2560320"/>
         </p:xfrm>
         <a:graphic>
           <a:graphicData uri="http://schemas.openxmlformats.org/drawingml/2006/table">
@@ -9750,9 +9750,9 @@
                 <a:tableStyleId>{5C22544A-7EE6-4342-B048-85BDC9FD1C3A}</a:tableStyleId>
               </a:tblPr>
               <a:tblGrid>
-                <a:gridCol w="3857385"/>
-                <a:gridCol w="3857385"/>
-                <a:gridCol w="3343067"/>
+                <a:gridCol w="3857396"/>
+                <a:gridCol w="3857396"/>
+                <a:gridCol w="3343046"/>
               </a:tblGrid>
               <a:tr h="365760">
                 <a:tc>
@@ -10418,7 +10418,7 @@
         </p:nvGraphicFramePr>
         <p:xfrm>
           <a:off x="566928" y="1874519"/>
-          <a:ext cx="11057838" cy="2560320"/>
+          <a:ext cx="11057837" cy="2560320"/>
         </p:xfrm>
         <a:graphic>
           <a:graphicData uri="http://schemas.openxmlformats.org/drawingml/2006/table">
@@ -10427,9 +10427,9 @@
                 <a:tableStyleId>{5C22544A-7EE6-4342-B048-85BDC9FD1C3A}</a:tableStyleId>
               </a:tblPr>
               <a:tblGrid>
-                <a:gridCol w="3015774"/>
-                <a:gridCol w="4021032"/>
-                <a:gridCol w="4021032"/>
+                <a:gridCol w="3015757"/>
+                <a:gridCol w="4021040"/>
+                <a:gridCol w="4021040"/>
               </a:tblGrid>
               <a:tr h="365760">
                 <a:tc>
@@ -11688,7 +11688,7 @@
         </p:nvGraphicFramePr>
         <p:xfrm>
           <a:off x="566928" y="1874519"/>
-          <a:ext cx="11057838" cy="2560320"/>
+          <a:ext cx="11057837" cy="2560320"/>
         </p:xfrm>
         <a:graphic>
           <a:graphicData uri="http://schemas.openxmlformats.org/drawingml/2006/table">
@@ -11697,9 +11697,9 @@
                 <a:tableStyleId>{5C22544A-7EE6-4342-B048-85BDC9FD1C3A}</a:tableStyleId>
               </a:tblPr>
               <a:tblGrid>
-                <a:gridCol w="4021032"/>
-                <a:gridCol w="3644060"/>
-                <a:gridCol w="3392746"/>
+                <a:gridCol w="4021040"/>
+                <a:gridCol w="3644036"/>
+                <a:gridCol w="3392761"/>
               </a:tblGrid>
               <a:tr h="365760">
                 <a:tc>
@@ -12413,9 +12413,9 @@
                 <a:tableStyleId>{5C22544A-7EE6-4342-B048-85BDC9FD1C3A}</a:tableStyleId>
               </a:tblPr>
               <a:tblGrid>
-                <a:gridCol w="2513145"/>
-                <a:gridCol w="4523661"/>
-                <a:gridCol w="4021032"/>
+                <a:gridCol w="2513136"/>
+                <a:gridCol w="4523628"/>
+                <a:gridCol w="4021074"/>
               </a:tblGrid>
               <a:tr h="365760">
                 <a:tc>
@@ -13129,8 +13129,8 @@
                 <a:tableStyleId>{5C22544A-7EE6-4342-B048-85BDC9FD1C3A}</a:tableStyleId>
               </a:tblPr>
               <a:tblGrid>
-                <a:gridCol w="3267088"/>
-                <a:gridCol w="7790750"/>
+                <a:gridCol w="3267059"/>
+                <a:gridCol w="7790779"/>
               </a:tblGrid>
               <a:tr h="365760">
                 <a:tc>
@@ -13865,7 +13865,7 @@
         </p:nvGraphicFramePr>
         <p:xfrm>
           <a:off x="566928" y="1874519"/>
-          <a:ext cx="11057838" cy="4023360"/>
+          <a:ext cx="11057837" cy="4023360"/>
         </p:xfrm>
         <a:graphic>
           <a:graphicData uri="http://schemas.openxmlformats.org/drawingml/2006/table">
@@ -13874,9 +13874,9 @@
                 <a:tableStyleId>{5C22544A-7EE6-4342-B048-85BDC9FD1C3A}</a:tableStyleId>
               </a:tblPr>
               <a:tblGrid>
-                <a:gridCol w="2513145"/>
-                <a:gridCol w="6157205"/>
-                <a:gridCol w="2387488"/>
+                <a:gridCol w="2513136"/>
+                <a:gridCol w="6157203"/>
+                <a:gridCol w="2387498"/>
               </a:tblGrid>
               <a:tr h="365760">
                 <a:tc>
@@ -14862,9 +14862,9 @@
                 <a:tableStyleId>{5C22544A-7EE6-4342-B048-85BDC9FD1C3A}</a:tableStyleId>
               </a:tblPr>
               <a:tblGrid>
-                <a:gridCol w="2395865"/>
-                <a:gridCol w="2764459"/>
-                <a:gridCol w="5897514"/>
+                <a:gridCol w="2395839"/>
+                <a:gridCol w="2764436"/>
+                <a:gridCol w="5897563"/>
               </a:tblGrid>
               <a:tr h="365760">
                 <a:tc>
@@ -16271,8 +16271,8 @@
                 <a:tableStyleId>{5C22544A-7EE6-4342-B048-85BDC9FD1C3A}</a:tableStyleId>
               </a:tblPr>
               <a:tblGrid>
-                <a:gridCol w="3133054"/>
-                <a:gridCol w="7924784"/>
+                <a:gridCol w="3133034"/>
+                <a:gridCol w="7924804"/>
               </a:tblGrid>
               <a:tr h="365760">
                 <a:tc>
@@ -18197,10 +18197,10 @@
                 <a:tableStyleId>{5C22544A-7EE6-4342-B048-85BDC9FD1C3A}</a:tableStyleId>
               </a:tblPr>
               <a:tblGrid>
-                <a:gridCol w="2613671"/>
-                <a:gridCol w="2613671"/>
-                <a:gridCol w="3216825"/>
-                <a:gridCol w="2613671"/>
+                <a:gridCol w="2613651"/>
+                <a:gridCol w="2613651"/>
+                <a:gridCol w="3216885"/>
+                <a:gridCol w="2613651"/>
               </a:tblGrid>
               <a:tr h="365760">
                 <a:tc>
@@ -23496,7 +23496,7 @@
         </p:nvGraphicFramePr>
         <p:xfrm>
           <a:off x="566928" y="1874519"/>
-          <a:ext cx="11057837" cy="1828800"/>
+          <a:ext cx="11057838" cy="1828800"/>
         </p:xfrm>
         <a:graphic>
           <a:graphicData uri="http://schemas.openxmlformats.org/drawingml/2006/table">
@@ -23508,7 +23508,7 @@
                 <a:gridCol w="2097176"/>
                 <a:gridCol w="2478481"/>
                 <a:gridCol w="2669133"/>
-                <a:gridCol w="3813047"/>
+                <a:gridCol w="3813048"/>
               </a:tblGrid>
               <a:tr h="365760">
                 <a:tc>
@@ -24646,7 +24646,7 @@
         </p:nvGraphicFramePr>
         <p:xfrm>
           <a:off x="566928" y="1874519"/>
-          <a:ext cx="11057838" cy="1828800"/>
+          <a:ext cx="11057837" cy="1828800"/>
         </p:xfrm>
         <a:graphic>
           <a:graphicData uri="http://schemas.openxmlformats.org/drawingml/2006/table">
@@ -24655,9 +24655,9 @@
                 <a:tableStyleId>{5C22544A-7EE6-4342-B048-85BDC9FD1C3A}</a:tableStyleId>
               </a:tblPr>
               <a:tblGrid>
-                <a:gridCol w="3015774"/>
+                <a:gridCol w="3015782"/>
                 <a:gridCol w="4423135"/>
-                <a:gridCol w="3618929"/>
+                <a:gridCol w="3618920"/>
               </a:tblGrid>
               <a:tr h="365760">
                 <a:tc>
@@ -29815,10 +29815,10 @@
                 <a:tableStyleId>{5C22544A-7EE6-4342-B048-85BDC9FD1C3A}</a:tableStyleId>
               </a:tblPr>
               <a:tblGrid>
-                <a:gridCol w="2211567"/>
-                <a:gridCol w="1871326"/>
-                <a:gridCol w="3487472"/>
-                <a:gridCol w="3487472"/>
+                <a:gridCol w="2211586"/>
+                <a:gridCol w="1871335"/>
+                <a:gridCol w="3487458"/>
+                <a:gridCol w="3487458"/>
               </a:tblGrid>
               <a:tr h="365760">
                 <a:tc>
@@ -30506,9 +30506,9 @@
                 <a:tableStyleId>{5C22544A-7EE6-4342-B048-85BDC9FD1C3A}</a:tableStyleId>
               </a:tblPr>
               <a:tblGrid>
-                <a:gridCol w="2381688"/>
-                <a:gridCol w="4593256"/>
-                <a:gridCol w="4082894"/>
+                <a:gridCol w="2381665"/>
+                <a:gridCol w="4593252"/>
+                <a:gridCol w="4082921"/>
               </a:tblGrid>
               <a:tr h="365760">
                 <a:tc>
@@ -32475,9 +32475,9 @@
                 <a:tableStyleId>{5C22544A-7EE6-4342-B048-85BDC9FD1C3A}</a:tableStyleId>
               </a:tblPr>
               <a:tblGrid>
-                <a:gridCol w="2551809"/>
-                <a:gridCol w="4678316"/>
-                <a:gridCol w="3827713"/>
+                <a:gridCol w="2551816"/>
+                <a:gridCol w="4678344"/>
+                <a:gridCol w="3827678"/>
               </a:tblGrid>
               <a:tr h="365760">
                 <a:tc>
@@ -37025,9 +37025,9 @@
                 <a:tableStyleId>{5C22544A-7EE6-4342-B048-85BDC9FD1C3A}</a:tableStyleId>
               </a:tblPr>
               <a:tblGrid>
-                <a:gridCol w="2381688"/>
+                <a:gridCol w="2381646"/>
                 <a:gridCol w="4423135"/>
-                <a:gridCol w="4253015"/>
+                <a:gridCol w="4253057"/>
               </a:tblGrid>
               <a:tr h="365760">
                 <a:tc>
@@ -38227,11 +38227,11 @@
                 <a:tableStyleId>{5C22544A-7EE6-4342-B048-85BDC9FD1C3A}</a:tableStyleId>
               </a:tblPr>
               <a:tblGrid>
-                <a:gridCol w="1701206"/>
-                <a:gridCol w="2721929"/>
+                <a:gridCol w="1701241"/>
+                <a:gridCol w="2721894"/>
                 <a:gridCol w="2211567"/>
-                <a:gridCol w="2126507"/>
-                <a:gridCol w="2296628"/>
+                <a:gridCol w="2126528"/>
+                <a:gridCol w="2296607"/>
               </a:tblGrid>
               <a:tr h="365760">
                 <a:tc>
@@ -39916,9 +39916,9 @@
                 <a:tableStyleId>{5C22544A-7EE6-4342-B048-85BDC9FD1C3A}</a:tableStyleId>
               </a:tblPr>
               <a:tblGrid>
-                <a:gridCol w="2369536"/>
-                <a:gridCol w="4344151"/>
-                <a:gridCol w="4344151"/>
+                <a:gridCol w="2369576"/>
+                <a:gridCol w="4344131"/>
+                <a:gridCol w="4344131"/>
               </a:tblGrid>
               <a:tr h="365760">
                 <a:tc>
@@ -42305,7 +42305,7 @@
         </p:nvGraphicFramePr>
         <p:xfrm>
           <a:off x="566928" y="1874519"/>
-          <a:ext cx="11057839" cy="1463040"/>
+          <a:ext cx="11057838" cy="1463040"/>
         </p:xfrm>
         <a:graphic>
           <a:graphicData uri="http://schemas.openxmlformats.org/drawingml/2006/table">
@@ -42314,9 +42314,9 @@
                 <a:tableStyleId>{5C22544A-7EE6-4342-B048-85BDC9FD1C3A}</a:tableStyleId>
               </a:tblPr>
               <a:tblGrid>
-                <a:gridCol w="2551809"/>
-                <a:gridCol w="4253015"/>
-                <a:gridCol w="4253015"/>
+                <a:gridCol w="2551794"/>
+                <a:gridCol w="4253022"/>
+                <a:gridCol w="4253022"/>
               </a:tblGrid>
               <a:tr h="365760">
                 <a:tc>
@@ -43974,11 +43974,11 @@
                 <a:tableStyleId>{5C22544A-7EE6-4342-B048-85BDC9FD1C3A}</a:tableStyleId>
               </a:tblPr>
               <a:tblGrid>
-                <a:gridCol w="1701206"/>
-                <a:gridCol w="2721929"/>
+                <a:gridCol w="1701241"/>
+                <a:gridCol w="2721894"/>
                 <a:gridCol w="2211567"/>
-                <a:gridCol w="2126507"/>
-                <a:gridCol w="2296628"/>
+                <a:gridCol w="2126528"/>
+                <a:gridCol w="2296607"/>
               </a:tblGrid>
               <a:tr h="365760">
                 <a:tc>
@@ -44690,7 +44690,7 @@
                 </a:solidFill>
                 <a:latin typeface="Calibri"/>
               </a:rPr>
-              <a:t>只列有真实云关联的环节。「托管 MLflow」指 SageMaker 与 Databricks 两家的托管版；注册表三家的产品全名是 SageMaker Model Registry、Azure ML Registries、Vertex AI Model Registry；Azure ML 与 Vertex 的流水线也有同类条件步骤。服务名与能力以 2026-08-02 各厂商官方文档为准；影子测试的时长与端点限制是 AWS 一家口径（默认 7 天、最长 30 天、一个端点只挂一个影子），别家做流量镜像的规格与配额不同，报方案前逐项复核。</a:t>
+              <a:t>只列有真实云关联的环节。「托管 MLflow」指 SageMaker 与 Databricks 两家的托管版；注册表三家的产品全名是 SageMaker Model Registry、Azure ML Registries、Gemini Enterprise Agent Platform Model Registry（原 Vertex AI Model Registry）；Azure ML 与 Vertex 的流水线也有同类条件步骤。服务名与能力以 2026-08-02 各厂商官方文档为准；影子测试的时长与端点限制是 AWS 一家口径（默认 7 天、最长 30 天、一个端点只挂一个影子），别家做流量镜像的规格与配额不同，报方案前逐项复核。</a:t>
             </a:r>
           </a:p>
         </p:txBody>
@@ -47998,10 +47998,10 @@
                 <a:tableStyleId>{5C22544A-7EE6-4342-B048-85BDC9FD1C3A}</a:tableStyleId>
               </a:tblPr>
               <a:tblGrid>
-                <a:gridCol w="2100989"/>
-                <a:gridCol w="2985616"/>
-                <a:gridCol w="2985616"/>
-                <a:gridCol w="2985616"/>
+                <a:gridCol w="2101016"/>
+                <a:gridCol w="2985607"/>
+                <a:gridCol w="2985607"/>
+                <a:gridCol w="2985607"/>
               </a:tblGrid>
               <a:tr h="365760">
                 <a:tc>
@@ -48689,10 +48689,10 @@
                 <a:tableStyleId>{5C22544A-7EE6-4342-B048-85BDC9FD1C3A}</a:tableStyleId>
               </a:tblPr>
               <a:tblGrid>
-                <a:gridCol w="2100989"/>
-                <a:gridCol w="2985616"/>
-                <a:gridCol w="2875038"/>
-                <a:gridCol w="3096194"/>
+                <a:gridCol w="2101016"/>
+                <a:gridCol w="2985607"/>
+                <a:gridCol w="2875056"/>
+                <a:gridCol w="3096158"/>
               </a:tblGrid>
               <a:tr h="365760">
                 <a:tc>
@@ -50199,7 +50199,7 @@
         </p:nvGraphicFramePr>
         <p:xfrm>
           <a:off x="566928" y="1874519"/>
-          <a:ext cx="11057837" cy="1828800"/>
+          <a:ext cx="11057838" cy="1828800"/>
         </p:xfrm>
         <a:graphic>
           <a:graphicData uri="http://schemas.openxmlformats.org/drawingml/2006/table">
@@ -50208,10 +50208,10 @@
                 <a:tableStyleId>{5C22544A-7EE6-4342-B048-85BDC9FD1C3A}</a:tableStyleId>
               </a:tblPr>
               <a:tblGrid>
-                <a:gridCol w="2432724"/>
-                <a:gridCol w="3096194"/>
-                <a:gridCol w="2875038"/>
-                <a:gridCol w="2653881"/>
+                <a:gridCol w="2432761"/>
+                <a:gridCol w="3096158"/>
+                <a:gridCol w="2875056"/>
+                <a:gridCol w="2653863"/>
               </a:tblGrid>
               <a:tr h="365760">
                 <a:tc>
@@ -52774,11 +52774,11 @@
                 <a:tableStyleId>{5C22544A-7EE6-4342-B048-85BDC9FD1C3A}</a:tableStyleId>
               </a:tblPr>
               <a:tblGrid>
-                <a:gridCol w="1701206"/>
-                <a:gridCol w="2721929"/>
+                <a:gridCol w="1701241"/>
+                <a:gridCol w="2721894"/>
                 <a:gridCol w="2211567"/>
-                <a:gridCol w="2126507"/>
-                <a:gridCol w="2296628"/>
+                <a:gridCol w="2126528"/>
+                <a:gridCol w="2296607"/>
               </a:tblGrid>
               <a:tr h="365760">
                 <a:tc>
@@ -52927,7 +52927,7 @@
                           </a:solidFill>
                           <a:latin typeface="Calibri"/>
                         </a:rPr>
-                        <a:t>Azure ML 漂移信号、Vertex AI 模型监控、Evidently</a:t>
+                        <a:t>Azure ML 漂移信号、Gemini Enterprise Agent Platform（原 Vertex AI）模型监控、Evidently</a:t>
                       </a:r>
                     </a:p>
                   </a:txBody>
@@ -55832,7 +55832,7 @@
         </p:nvGraphicFramePr>
         <p:xfrm>
           <a:off x="566928" y="1874519"/>
-          <a:ext cx="11057838" cy="1828800"/>
+          <a:ext cx="11057839" cy="1828800"/>
         </p:xfrm>
         <a:graphic>
           <a:graphicData uri="http://schemas.openxmlformats.org/drawingml/2006/table">
@@ -55843,7 +55843,7 @@
               <a:tblGrid>
                 <a:gridCol w="3685946"/>
                 <a:gridCol w="3685946"/>
-                <a:gridCol w="3685946"/>
+                <a:gridCol w="3685947"/>
               </a:tblGrid>
               <a:tr h="365760">
                 <a:tc>
@@ -56412,7 +56412,7 @@
         </p:nvGraphicFramePr>
         <p:xfrm>
           <a:off x="566928" y="1874519"/>
-          <a:ext cx="11057837" cy="1828800"/>
+          <a:ext cx="11057838" cy="1828800"/>
         </p:xfrm>
         <a:graphic>
           <a:graphicData uri="http://schemas.openxmlformats.org/drawingml/2006/table">
@@ -56421,10 +56421,10 @@
                 <a:tableStyleId>{5C22544A-7EE6-4342-B048-85BDC9FD1C3A}</a:tableStyleId>
               </a:tblPr>
               <a:tblGrid>
-                <a:gridCol w="2653881"/>
-                <a:gridCol w="2432724"/>
-                <a:gridCol w="2875038"/>
-                <a:gridCol w="3096194"/>
+                <a:gridCol w="2653863"/>
+                <a:gridCol w="2432761"/>
+                <a:gridCol w="2875056"/>
+                <a:gridCol w="3096158"/>
               </a:tblGrid>
               <a:tr h="365760">
                 <a:tc>
@@ -57562,7 +57562,7 @@
         </p:nvGraphicFramePr>
         <p:xfrm>
           <a:off x="566928" y="1874519"/>
-          <a:ext cx="11057837" cy="1463040"/>
+          <a:ext cx="11057838" cy="1463040"/>
         </p:xfrm>
         <a:graphic>
           <a:graphicData uri="http://schemas.openxmlformats.org/drawingml/2006/table">
@@ -57571,10 +57571,10 @@
                 <a:tableStyleId>{5C22544A-7EE6-4342-B048-85BDC9FD1C3A}</a:tableStyleId>
               </a:tblPr>
               <a:tblGrid>
-                <a:gridCol w="2432724"/>
-                <a:gridCol w="3317351"/>
-                <a:gridCol w="2432724"/>
-                <a:gridCol w="2875038"/>
+                <a:gridCol w="2432741"/>
+                <a:gridCol w="3317324"/>
+                <a:gridCol w="2432741"/>
+                <a:gridCol w="2875032"/>
               </a:tblGrid>
               <a:tr h="365760">
                 <a:tc>
